--- a/docs/ahg-2026/kit/read-me.pptx
+++ b/docs/ahg-2026/kit/read-me.pptx
@@ -23,6 +23,11 @@
     <p:sldId id="271" r:id="rId22"/>
     <p:sldId id="272" r:id="rId23"/>
     <p:sldId id="273" r:id="rId24"/>
+    <p:sldId id="274" r:id="rId25"/>
+    <p:sldId id="275" r:id="rId26"/>
+    <p:sldId id="276" r:id="rId27"/>
+    <p:sldId id="277" r:id="rId28"/>
+    <p:sldId id="278" r:id="rId29"/>
   </p:sldIdLst>
   <p:sldSz cx="12191695" cy="6858000" type="screen4x3"/>
   <p:notesSz cx="6858000" cy="9144000"/>
@@ -3771,7 +3776,7 @@
                         <a:rPr sz="1800" b="0" lang="en-US">
                           <a:latin typeface="Arial"/>
                         </a:rPr>
-                        <a:t>One card per block, as Markdown and as large print Word files</a:t>
+                        <a:t>One card per block, each as Markdown, HTML, a large print Word file and a reading deck</a:t>
                       </a:r>
                     </a:p>
                   </a:txBody>
@@ -4104,7 +4109,7 @@
         </p:nvGraphicFramePr>
         <p:xfrm>
           <a:off x="548640" y="1554480"/>
-          <a:ext cx="11064240" cy="914400"/>
+          <a:ext cx="11064240" cy="1371600"/>
         </p:xfrm>
         <a:graphic>
           <a:graphicData uri="http://schemas.openxmlformats.org/drawingml/2006/table">
@@ -4174,6 +4179,38 @@
                           <a:latin typeface="Arial"/>
                         </a:rPr>
                         <a:t>What makes a good agent file, and the twelve review questions /review-my-agent uses</a:t>
+                      </a:r>
+                    </a:p>
+                  </a:txBody>
+                  <a:tcPr/>
+                </a:tc>
+              </a:tr>
+              <a:tr h="457200">
+                <a:tc>
+                  <a:txBody>
+                    <a:bodyPr wrap="square"/>
+                    <a:lstStyle/>
+                    <a:p>
+                      <a:r>
+                        <a:rPr sz="1800" b="0" lang="en-US">
+                          <a:latin typeface="Consolas"/>
+                        </a:rPr>
+                        <a:t>glossary.md</a:t>
+                      </a:r>
+                    </a:p>
+                  </a:txBody>
+                  <a:tcPr/>
+                </a:tc>
+                <a:tc>
+                  <a:txBody>
+                    <a:bodyPr wrap="square"/>
+                    <a:lstStyle/>
+                    <a:p>
+                      <a:r>
+                        <a:rPr sz="1800" b="0" lang="en-US">
+                          <a:latin typeface="Arial"/>
+                        </a:rPr>
+                        <a:t>The words used today, one line each</a:t>
                       </a:r>
                     </a:p>
                   </a:txBody>
@@ -4332,7 +4369,7 @@
               <a:rPr sz="3600" b="1" lang="en-US">
                 <a:latin typeface="Arial"/>
               </a:rPr>
-              <a:t>Keys worth knowing (1 of 2)</a:t>
+              <a:t>If you use a screen reader (1 of 2)</a:t>
             </a:r>
           </a:p>
         </p:txBody>
@@ -4367,7 +4404,59 @@
               <a:rPr sz="2000" b="0" lang="en-US">
                 <a:latin typeface="Arial"/>
               </a:rPr>
-              <a:t>These work in every part of VS Code, on a computer and at vscode.dev.</a:t>
+              <a:t>Everything today works with NVDA, JAWS and VoiceOver, on every path.</a:t>
+            </a:r>
+          </a:p>
+          <a:p>
+            <a:pPr lvl="1">
+              <a:spcAft>
+                <a:spcPts val="600"/>
+              </a:spcAft>
+            </a:pPr>
+            <a:r>
+              <a:rPr sz="2000" b="0" lang="en-US">
+                <a:latin typeface="Arial"/>
+              </a:rPr>
+              <a:t>In VS Code, Copilot's answers are long. Move to the answer and press Alt+F2 (Option+F2 on a Mac) to read it as plain text in the Accessible View. Inside it, Control+Alt+Page Down and Control+Alt+Page Up move between code blocks.</a:t>
+            </a:r>
+          </a:p>
+          <a:p>
+            <a:pPr lvl="1">
+              <a:spcAft>
+                <a:spcPts val="600"/>
+              </a:spcAft>
+            </a:pPr>
+            <a:r>
+              <a:rPr sz="2000" b="0" lang="en-US">
+                <a:latin typeface="Arial"/>
+              </a:rPr>
+              <a:t>VS Code plays a sound when an answer arrives, and another when Copilot needs you to approve something, such as saving your agent file. Help: List Signal Sounds turns them on or off.</a:t>
+            </a:r>
+          </a:p>
+          <a:p>
+            <a:pPr lvl="1">
+              <a:spcAft>
+                <a:spcPts val="600"/>
+              </a:spcAft>
+            </a:pPr>
+            <a:r>
+              <a:rPr sz="2000" b="0" lang="en-US">
+                <a:latin typeface="Arial"/>
+              </a:rPr>
+              <a:t>Alt+F1 (Option+F1) in the chat box opens accessibility help for chat. F6 moves between the parts of the window.</a:t>
+            </a:r>
+          </a:p>
+          <a:p>
+            <a:pPr lvl="1">
+              <a:spcAft>
+                <a:spcPts val="600"/>
+              </a:spcAft>
+            </a:pPr>
+            <a:r>
+              <a:rPr sz="2000" b="0" lang="en-US">
+                <a:latin typeface="Arial"/>
+              </a:rPr>
+              <a:t>On the browser path, every block's text at letitglow.app/ahg/assistant has a Copy button. A message under the button says it is copied.</a:t>
             </a:r>
           </a:p>
         </p:txBody>
@@ -4414,367 +4503,58 @@
               <a:rPr sz="3600" b="1" lang="en-US">
                 <a:latin typeface="Arial"/>
               </a:rPr>
-              <a:t>Keys worth knowing (2 of 2)</a:t>
-            </a:r>
-          </a:p>
-        </p:txBody>
-      </p:sp>
-      <p:graphicFrame>
-        <p:nvGraphicFramePr>
-          <p:cNvPr id="3" name="Table 2" descr="Table: Keys worth knowing. Columns: To, Windows, Mac."/>
-          <p:cNvGraphicFramePr>
-            <a:graphicFrameLocks noGrp="1"/>
-          </p:cNvGraphicFramePr>
-          <p:nvPr/>
-        </p:nvGraphicFramePr>
-        <p:xfrm>
-          <a:off x="548640" y="1554480"/>
-          <a:ext cx="11064240" cy="3200400"/>
-        </p:xfrm>
-        <a:graphic>
-          <a:graphicData uri="http://schemas.openxmlformats.org/drawingml/2006/table">
-            <a:tbl>
-              <a:tblPr firstRow="1" bandRow="1">
-                <a:tableStyleId>{5C22544A-7EE6-4342-B048-85BDC9FD1C3A}</a:tableStyleId>
-              </a:tblPr>
-              <a:tblGrid>
-                <a:gridCol w="3688080"/>
-                <a:gridCol w="3688080"/>
-                <a:gridCol w="3688080"/>
-              </a:tblGrid>
-              <a:tr h="457200">
-                <a:tc>
-                  <a:txBody>
-                    <a:bodyPr/>
-                    <a:lstStyle/>
-                    <a:p>
-                      <a:r>
-                        <a:rPr sz="1800" b="1" lang="en-US">
-                          <a:latin typeface="Arial"/>
-                        </a:rPr>
-                        <a:t>To</a:t>
-                      </a:r>
-                    </a:p>
-                  </a:txBody>
-                  <a:tcPr/>
-                </a:tc>
-                <a:tc>
-                  <a:txBody>
-                    <a:bodyPr/>
-                    <a:lstStyle/>
-                    <a:p>
-                      <a:r>
-                        <a:rPr sz="1800" b="1" lang="en-US">
-                          <a:latin typeface="Arial"/>
-                        </a:rPr>
-                        <a:t>Windows</a:t>
-                      </a:r>
-                    </a:p>
-                  </a:txBody>
-                  <a:tcPr/>
-                </a:tc>
-                <a:tc>
-                  <a:txBody>
-                    <a:bodyPr/>
-                    <a:lstStyle/>
-                    <a:p>
-                      <a:r>
-                        <a:rPr sz="1800" b="1" lang="en-US">
-                          <a:latin typeface="Arial"/>
-                        </a:rPr>
-                        <a:t>Mac</a:t>
-                      </a:r>
-                    </a:p>
-                  </a:txBody>
-                  <a:tcPr/>
-                </a:tc>
-              </a:tr>
-              <a:tr h="457200">
-                <a:tc>
-                  <a:txBody>
-                    <a:bodyPr wrap="square"/>
-                    <a:lstStyle/>
-                    <a:p>
-                      <a:r>
-                        <a:rPr sz="1800" b="0" lang="en-US">
-                          <a:latin typeface="Arial"/>
-                        </a:rPr>
-                        <a:t>Open Copilot Chat</a:t>
-                      </a:r>
-                    </a:p>
-                  </a:txBody>
-                  <a:tcPr/>
-                </a:tc>
-                <a:tc>
-                  <a:txBody>
-                    <a:bodyPr wrap="square"/>
-                    <a:lstStyle/>
-                    <a:p>
-                      <a:r>
-                        <a:rPr sz="1800" b="0" lang="en-US">
-                          <a:latin typeface="Arial"/>
-                        </a:rPr>
-                        <a:t>Control+Alt+I</a:t>
-                      </a:r>
-                    </a:p>
-                  </a:txBody>
-                  <a:tcPr/>
-                </a:tc>
-                <a:tc>
-                  <a:txBody>
-                    <a:bodyPr wrap="square"/>
-                    <a:lstStyle/>
-                    <a:p>
-                      <a:r>
-                        <a:rPr sz="1800" b="0" lang="en-US">
-                          <a:latin typeface="Arial"/>
-                        </a:rPr>
-                        <a:t>Control+Command+I</a:t>
-                      </a:r>
-                    </a:p>
-                  </a:txBody>
-                  <a:tcPr/>
-                </a:tc>
-              </a:tr>
-              <a:tr h="457200">
-                <a:tc>
-                  <a:txBody>
-                    <a:bodyPr wrap="square"/>
-                    <a:lstStyle/>
-                    <a:p>
-                      <a:r>
-                        <a:rPr sz="1800" b="0" lang="en-US">
-                          <a:latin typeface="Arial"/>
-                        </a:rPr>
-                        <a:t>Read Copilot's last answer as plain text</a:t>
-                      </a:r>
-                    </a:p>
-                  </a:txBody>
-                  <a:tcPr/>
-                </a:tc>
-                <a:tc>
-                  <a:txBody>
-                    <a:bodyPr wrap="square"/>
-                    <a:lstStyle/>
-                    <a:p>
-                      <a:r>
-                        <a:rPr sz="1800" b="0" lang="en-US">
-                          <a:latin typeface="Arial"/>
-                        </a:rPr>
-                        <a:t>Alt+F2</a:t>
-                      </a:r>
-                    </a:p>
-                  </a:txBody>
-                  <a:tcPr/>
-                </a:tc>
-                <a:tc>
-                  <a:txBody>
-                    <a:bodyPr wrap="square"/>
-                    <a:lstStyle/>
-                    <a:p>
-                      <a:r>
-                        <a:rPr sz="1800" b="0" lang="en-US">
-                          <a:latin typeface="Arial"/>
-                        </a:rPr>
-                        <a:t>Option+F2</a:t>
-                      </a:r>
-                    </a:p>
-                  </a:txBody>
-                  <a:tcPr/>
-                </a:tc>
-              </a:tr>
-              <a:tr h="457200">
-                <a:tc>
-                  <a:txBody>
-                    <a:bodyPr wrap="square"/>
-                    <a:lstStyle/>
-                    <a:p>
-                      <a:r>
-                        <a:rPr sz="1800" b="0" lang="en-US">
-                          <a:latin typeface="Arial"/>
-                        </a:rPr>
-                        <a:t>Open any file by name</a:t>
-                      </a:r>
-                    </a:p>
-                  </a:txBody>
-                  <a:tcPr/>
-                </a:tc>
-                <a:tc>
-                  <a:txBody>
-                    <a:bodyPr wrap="square"/>
-                    <a:lstStyle/>
-                    <a:p>
-                      <a:r>
-                        <a:rPr sz="1800" b="0" lang="en-US">
-                          <a:latin typeface="Arial"/>
-                        </a:rPr>
-                        <a:t>Control+P</a:t>
-                      </a:r>
-                    </a:p>
-                  </a:txBody>
-                  <a:tcPr/>
-                </a:tc>
-                <a:tc>
-                  <a:txBody>
-                    <a:bodyPr wrap="square"/>
-                    <a:lstStyle/>
-                    <a:p>
-                      <a:r>
-                        <a:rPr sz="1800" b="0" lang="en-US">
-                          <a:latin typeface="Arial"/>
-                        </a:rPr>
-                        <a:t>Command+P</a:t>
-                      </a:r>
-                    </a:p>
-                  </a:txBody>
-                  <a:tcPr/>
-                </a:tc>
-              </a:tr>
-              <a:tr h="457200">
-                <a:tc>
-                  <a:txBody>
-                    <a:bodyPr wrap="square"/>
-                    <a:lstStyle/>
-                    <a:p>
-                      <a:r>
-                        <a:rPr sz="1800" b="0" lang="en-US">
-                          <a:latin typeface="Arial"/>
-                        </a:rPr>
-                        <a:t>Find any command</a:t>
-                      </a:r>
-                    </a:p>
-                  </a:txBody>
-                  <a:tcPr/>
-                </a:tc>
-                <a:tc>
-                  <a:txBody>
-                    <a:bodyPr wrap="square"/>
-                    <a:lstStyle/>
-                    <a:p>
-                      <a:r>
-                        <a:rPr sz="1800" b="0" lang="en-US">
-                          <a:latin typeface="Arial"/>
-                        </a:rPr>
-                        <a:t>Control+Shift+P</a:t>
-                      </a:r>
-                    </a:p>
-                  </a:txBody>
-                  <a:tcPr/>
-                </a:tc>
-                <a:tc>
-                  <a:txBody>
-                    <a:bodyPr wrap="square"/>
-                    <a:lstStyle/>
-                    <a:p>
-                      <a:r>
-                        <a:rPr sz="1800" b="0" lang="en-US">
-                          <a:latin typeface="Arial"/>
-                        </a:rPr>
-                        <a:t>Command+Shift+P</a:t>
-                      </a:r>
-                    </a:p>
-                  </a:txBody>
-                  <a:tcPr/>
-                </a:tc>
-              </a:tr>
-              <a:tr h="457200">
-                <a:tc>
-                  <a:txBody>
-                    <a:bodyPr wrap="square"/>
-                    <a:lstStyle/>
-                    <a:p>
-                      <a:r>
-                        <a:rPr sz="1800" b="0" lang="en-US">
-                          <a:latin typeface="Arial"/>
-                        </a:rPr>
-                        <a:t>Move between parts of the window</a:t>
-                      </a:r>
-                    </a:p>
-                  </a:txBody>
-                  <a:tcPr/>
-                </a:tc>
-                <a:tc>
-                  <a:txBody>
-                    <a:bodyPr wrap="square"/>
-                    <a:lstStyle/>
-                    <a:p>
-                      <a:r>
-                        <a:rPr sz="1800" b="0" lang="en-US">
-                          <a:latin typeface="Arial"/>
-                        </a:rPr>
-                        <a:t>F6</a:t>
-                      </a:r>
-                    </a:p>
-                  </a:txBody>
-                  <a:tcPr/>
-                </a:tc>
-                <a:tc>
-                  <a:txBody>
-                    <a:bodyPr wrap="square"/>
-                    <a:lstStyle/>
-                    <a:p>
-                      <a:r>
-                        <a:rPr sz="1800" b="0" lang="en-US">
-                          <a:latin typeface="Arial"/>
-                        </a:rPr>
-                        <a:t>F6</a:t>
-                      </a:r>
-                    </a:p>
-                  </a:txBody>
-                  <a:tcPr/>
-                </a:tc>
-              </a:tr>
-              <a:tr h="457200">
-                <a:tc>
-                  <a:txBody>
-                    <a:bodyPr wrap="square"/>
-                    <a:lstStyle/>
-                    <a:p>
-                      <a:r>
-                        <a:rPr sz="1800" b="0" lang="en-US">
-                          <a:latin typeface="Arial"/>
-                        </a:rPr>
-                        <a:t>Accessibility help for where you are</a:t>
-                      </a:r>
-                    </a:p>
-                  </a:txBody>
-                  <a:tcPr/>
-                </a:tc>
-                <a:tc>
-                  <a:txBody>
-                    <a:bodyPr wrap="square"/>
-                    <a:lstStyle/>
-                    <a:p>
-                      <a:r>
-                        <a:rPr sz="1800" b="0" lang="en-US">
-                          <a:latin typeface="Arial"/>
-                        </a:rPr>
-                        <a:t>Alt+F1</a:t>
-                      </a:r>
-                    </a:p>
-                  </a:txBody>
-                  <a:tcPr/>
-                </a:tc>
-                <a:tc>
-                  <a:txBody>
-                    <a:bodyPr wrap="square"/>
-                    <a:lstStyle/>
-                    <a:p>
-                      <a:r>
-                        <a:rPr sz="1800" b="0" lang="en-US">
-                          <a:latin typeface="Arial"/>
-                        </a:rPr>
-                        <a:t>Option+F1</a:t>
-                      </a:r>
-                    </a:p>
-                  </a:txBody>
-                  <a:tcPr/>
-                </a:tc>
-              </a:tr>
-            </a:tbl>
-          </a:graphicData>
-        </a:graphic>
-      </p:graphicFrame>
+              <a:t>If you use a screen reader (2 of 2)</a:t>
+            </a:r>
+          </a:p>
+        </p:txBody>
+      </p:sp>
+      <p:sp>
+        <p:nvSpPr>
+          <p:cNvPr id="3" name="Content Placeholder 2"/>
+          <p:cNvSpPr>
+            <a:spLocks noGrp="1"/>
+          </p:cNvSpPr>
+          <p:nvPr>
+            <p:ph idx="1"/>
+          </p:nvPr>
+        </p:nvSpPr>
+        <p:spPr>
+          <a:xfrm>
+            <a:off x="548640" y="1554480"/>
+            <a:ext cx="11064240" cy="4937760"/>
+          </a:xfrm>
+        </p:spPr>
+        <p:txBody>
+          <a:bodyPr wrap="square"/>
+          <a:lstStyle/>
+          <a:p>
+            <a:pPr lvl="1">
+              <a:spcAft>
+                <a:spcPts val="600"/>
+              </a:spcAft>
+            </a:pPr>
+            <a:r>
+              <a:rPr sz="2000" b="0" lang="en-US">
+                <a:latin typeface="Arial"/>
+              </a:rPr>
+              <a:t>On GitHub's share form, everything is filled in for you. Move to the end of the form, select the check box that says your agent contains nothing private, then press Submit new issue. The reply appears on the same page in about a minute; press F5 if your screen reader does not announce it.</a:t>
+            </a:r>
+          </a:p>
+          <a:p>
+            <a:pPr lvl="1">
+              <a:spcAft>
+                <a:spcPts val="600"/>
+              </a:spcAft>
+            </a:pPr>
+            <a:r>
+              <a:rPr sz="2000" b="0" lang="en-US">
+                <a:latin typeface="Arial"/>
+              </a:rPr>
+              <a:t>Step cards 3 and 5 say where the long answers are and how to read them.</a:t>
+            </a:r>
+          </a:p>
+        </p:txBody>
+      </p:sp>
     </p:spTree>
   </p:cSld>
   <p:clrMapOvr>
@@ -4817,7 +4597,7 @@
               <a:rPr sz="3600" b="1" lang="en-US">
                 <a:latin typeface="Arial"/>
               </a:rPr>
-              <a:t>The two rules</a:t>
+              <a:t>Keys worth knowing (1 of 4)</a:t>
             </a:r>
           </a:p>
         </p:txBody>
@@ -4842,46 +4622,6 @@
           <a:bodyPr wrap="square"/>
           <a:lstStyle/>
           <a:p>
-            <a:pPr lvl="1">
-              <a:spcAft>
-                <a:spcPts val="600"/>
-              </a:spcAft>
-              <a:buNone/>
-            </a:pPr>
-            <a:r>
-              <a:rPr sz="2000" b="0" lang="en-US">
-                <a:latin typeface="Arial"/>
-              </a:rPr>
-              <a:t>1. </a:t>
-            </a:r>
-            <a:r>
-              <a:rPr sz="2000" b="0" lang="en-US">
-                <a:latin typeface="Arial"/>
-              </a:rPr>
-              <a:t>Never paste anything private into any AI: student records, health or disability information, or anyone's name. Use the sample course.</a:t>
-            </a:r>
-          </a:p>
-          <a:p>
-            <a:pPr lvl="1">
-              <a:spcAft>
-                <a:spcPts val="600"/>
-              </a:spcAft>
-              <a:buNone/>
-            </a:pPr>
-            <a:r>
-              <a:rPr sz="2000" b="0" lang="en-US">
-                <a:latin typeface="Arial"/>
-              </a:rPr>
-              <a:t>2. </a:t>
-            </a:r>
-            <a:r>
-              <a:rPr sz="2000" b="0" lang="en-US">
-                <a:latin typeface="Arial"/>
-              </a:rPr>
-              <a:t>Every agent ends with a person checking its work.</a:t>
-            </a:r>
-          </a:p>
-          <a:p>
             <a:pPr marL="0" indent="0">
               <a:spcAft>
                 <a:spcPts val="600"/>
@@ -4892,24 +4632,367 @@
               <a:rPr sz="2000" b="0" lang="en-US">
                 <a:latin typeface="Arial"/>
               </a:rPr>
-              <a:t>Help, before or after the day: </a:t>
-            </a:r>
-            <a:r>
-              <a:rPr sz="2000" b="0" lang="en-US">
+              <a:t>These work in every part of VS Code, on a computer and at vscode.dev.</a:t>
+            </a:r>
+          </a:p>
+        </p:txBody>
+      </p:sp>
+    </p:spTree>
+  </p:cSld>
+  <p:clrMapOvr>
+    <a:masterClrMapping/>
+  </p:clrMapOvr>
+</p:sld>
+</file>
+
+<file path=ppt/slides/slide19.xml><?xml version="1.0" encoding="utf-8"?>
+<p:sld xmlns:a="http://schemas.openxmlformats.org/drawingml/2006/main" xmlns:p="http://schemas.openxmlformats.org/presentationml/2006/main" xmlns:r="http://schemas.openxmlformats.org/officeDocument/2006/relationships">
+  <p:cSld>
+    <p:spTree>
+      <p:nvGrpSpPr>
+        <p:cNvPr id="1" name=""/>
+        <p:cNvGrpSpPr/>
+        <p:nvPr/>
+      </p:nvGrpSpPr>
+      <p:grpSpPr/>
+      <p:sp>
+        <p:nvSpPr>
+          <p:cNvPr id="2" name="Title 1"/>
+          <p:cNvSpPr>
+            <a:spLocks noGrp="1"/>
+          </p:cNvSpPr>
+          <p:nvPr>
+            <p:ph type="title"/>
+          </p:nvPr>
+        </p:nvSpPr>
+        <p:spPr>
+          <a:xfrm>
+            <a:off x="548640" y="365760"/>
+            <a:ext cx="11064240" cy="1097280"/>
+          </a:xfrm>
+        </p:spPr>
+        <p:txBody>
+          <a:bodyPr wrap="square"/>
+          <a:lstStyle/>
+          <a:p>
+            <a:r>
+              <a:rPr sz="3600" b="1" lang="en-US">
                 <a:latin typeface="Arial"/>
-                <a:hlinkClick r:id="rId2"/>
-              </a:rPr>
-              <a:t>support@community-access.org</a:t>
-            </a:r>
-            <a:r>
-              <a:rPr sz="2000" b="0" lang="en-US">
-                <a:latin typeface="Arial"/>
-              </a:rPr>
-              <a:t>.</a:t>
-            </a:r>
-          </a:p>
-        </p:txBody>
-      </p:sp>
+              </a:rPr>
+              <a:t>Keys worth knowing (2 of 4)</a:t>
+            </a:r>
+          </a:p>
+        </p:txBody>
+      </p:sp>
+      <p:graphicFrame>
+        <p:nvGraphicFramePr>
+          <p:cNvPr id="3" name="Table 2" descr="Table: Keys worth knowing. Columns: To, Windows, Mac."/>
+          <p:cNvGraphicFramePr>
+            <a:graphicFrameLocks noGrp="1"/>
+          </p:cNvGraphicFramePr>
+          <p:nvPr/>
+        </p:nvGraphicFramePr>
+        <p:xfrm>
+          <a:off x="548640" y="1554480"/>
+          <a:ext cx="11064240" cy="2743200"/>
+        </p:xfrm>
+        <a:graphic>
+          <a:graphicData uri="http://schemas.openxmlformats.org/drawingml/2006/table">
+            <a:tbl>
+              <a:tblPr firstRow="1" bandRow="1">
+                <a:tableStyleId>{5C22544A-7EE6-4342-B048-85BDC9FD1C3A}</a:tableStyleId>
+              </a:tblPr>
+              <a:tblGrid>
+                <a:gridCol w="3688080"/>
+                <a:gridCol w="3688080"/>
+                <a:gridCol w="3688080"/>
+              </a:tblGrid>
+              <a:tr h="457200">
+                <a:tc>
+                  <a:txBody>
+                    <a:bodyPr/>
+                    <a:lstStyle/>
+                    <a:p>
+                      <a:r>
+                        <a:rPr sz="1800" b="1" lang="en-US">
+                          <a:latin typeface="Arial"/>
+                        </a:rPr>
+                        <a:t>To</a:t>
+                      </a:r>
+                    </a:p>
+                  </a:txBody>
+                  <a:tcPr/>
+                </a:tc>
+                <a:tc>
+                  <a:txBody>
+                    <a:bodyPr/>
+                    <a:lstStyle/>
+                    <a:p>
+                      <a:r>
+                        <a:rPr sz="1800" b="1" lang="en-US">
+                          <a:latin typeface="Arial"/>
+                        </a:rPr>
+                        <a:t>Windows</a:t>
+                      </a:r>
+                    </a:p>
+                  </a:txBody>
+                  <a:tcPr/>
+                </a:tc>
+                <a:tc>
+                  <a:txBody>
+                    <a:bodyPr/>
+                    <a:lstStyle/>
+                    <a:p>
+                      <a:r>
+                        <a:rPr sz="1800" b="1" lang="en-US">
+                          <a:latin typeface="Arial"/>
+                        </a:rPr>
+                        <a:t>Mac</a:t>
+                      </a:r>
+                    </a:p>
+                  </a:txBody>
+                  <a:tcPr/>
+                </a:tc>
+              </a:tr>
+              <a:tr h="457200">
+                <a:tc>
+                  <a:txBody>
+                    <a:bodyPr wrap="square"/>
+                    <a:lstStyle/>
+                    <a:p>
+                      <a:r>
+                        <a:rPr sz="1800" b="0" lang="en-US">
+                          <a:latin typeface="Arial"/>
+                        </a:rPr>
+                        <a:t>Open Copilot Chat</a:t>
+                      </a:r>
+                    </a:p>
+                  </a:txBody>
+                  <a:tcPr/>
+                </a:tc>
+                <a:tc>
+                  <a:txBody>
+                    <a:bodyPr wrap="square"/>
+                    <a:lstStyle/>
+                    <a:p>
+                      <a:r>
+                        <a:rPr sz="1800" b="0" lang="en-US">
+                          <a:latin typeface="Arial"/>
+                        </a:rPr>
+                        <a:t>Control+Alt+I</a:t>
+                      </a:r>
+                    </a:p>
+                  </a:txBody>
+                  <a:tcPr/>
+                </a:tc>
+                <a:tc>
+                  <a:txBody>
+                    <a:bodyPr wrap="square"/>
+                    <a:lstStyle/>
+                    <a:p>
+                      <a:r>
+                        <a:rPr sz="1800" b="0" lang="en-US">
+                          <a:latin typeface="Arial"/>
+                        </a:rPr>
+                        <a:t>Control+Command+I</a:t>
+                      </a:r>
+                    </a:p>
+                  </a:txBody>
+                  <a:tcPr/>
+                </a:tc>
+              </a:tr>
+              <a:tr h="457200">
+                <a:tc>
+                  <a:txBody>
+                    <a:bodyPr wrap="square"/>
+                    <a:lstStyle/>
+                    <a:p>
+                      <a:r>
+                        <a:rPr sz="1800" b="0" lang="en-US">
+                          <a:latin typeface="Arial"/>
+                        </a:rPr>
+                        <a:t>Read an answer as plain text, in the Accessible View: move to the answer, then press</a:t>
+                      </a:r>
+                    </a:p>
+                  </a:txBody>
+                  <a:tcPr/>
+                </a:tc>
+                <a:tc>
+                  <a:txBody>
+                    <a:bodyPr wrap="square"/>
+                    <a:lstStyle/>
+                    <a:p>
+                      <a:r>
+                        <a:rPr sz="1800" b="0" lang="en-US">
+                          <a:latin typeface="Arial"/>
+                        </a:rPr>
+                        <a:t>Alt+F2</a:t>
+                      </a:r>
+                    </a:p>
+                  </a:txBody>
+                  <a:tcPr/>
+                </a:tc>
+                <a:tc>
+                  <a:txBody>
+                    <a:bodyPr wrap="square"/>
+                    <a:lstStyle/>
+                    <a:p>
+                      <a:r>
+                        <a:rPr sz="1800" b="0" lang="en-US">
+                          <a:latin typeface="Arial"/>
+                        </a:rPr>
+                        <a:t>Option+F2</a:t>
+                      </a:r>
+                    </a:p>
+                  </a:txBody>
+                  <a:tcPr/>
+                </a:tc>
+              </a:tr>
+              <a:tr h="457200">
+                <a:tc>
+                  <a:txBody>
+                    <a:bodyPr wrap="square"/>
+                    <a:lstStyle/>
+                    <a:p>
+                      <a:r>
+                        <a:rPr sz="1800" b="0" lang="en-US">
+                          <a:latin typeface="Arial"/>
+                        </a:rPr>
+                        <a:t>Open any file by name</a:t>
+                      </a:r>
+                    </a:p>
+                  </a:txBody>
+                  <a:tcPr/>
+                </a:tc>
+                <a:tc>
+                  <a:txBody>
+                    <a:bodyPr wrap="square"/>
+                    <a:lstStyle/>
+                    <a:p>
+                      <a:r>
+                        <a:rPr sz="1800" b="0" lang="en-US">
+                          <a:latin typeface="Arial"/>
+                        </a:rPr>
+                        <a:t>Control+P</a:t>
+                      </a:r>
+                    </a:p>
+                  </a:txBody>
+                  <a:tcPr/>
+                </a:tc>
+                <a:tc>
+                  <a:txBody>
+                    <a:bodyPr wrap="square"/>
+                    <a:lstStyle/>
+                    <a:p>
+                      <a:r>
+                        <a:rPr sz="1800" b="0" lang="en-US">
+                          <a:latin typeface="Arial"/>
+                        </a:rPr>
+                        <a:t>Command+P</a:t>
+                      </a:r>
+                    </a:p>
+                  </a:txBody>
+                  <a:tcPr/>
+                </a:tc>
+              </a:tr>
+              <a:tr h="457200">
+                <a:tc>
+                  <a:txBody>
+                    <a:bodyPr wrap="square"/>
+                    <a:lstStyle/>
+                    <a:p>
+                      <a:r>
+                        <a:rPr sz="1800" b="0" lang="en-US">
+                          <a:latin typeface="Arial"/>
+                        </a:rPr>
+                        <a:t>Find any command</a:t>
+                      </a:r>
+                    </a:p>
+                  </a:txBody>
+                  <a:tcPr/>
+                </a:tc>
+                <a:tc>
+                  <a:txBody>
+                    <a:bodyPr wrap="square"/>
+                    <a:lstStyle/>
+                    <a:p>
+                      <a:r>
+                        <a:rPr sz="1800" b="0" lang="en-US">
+                          <a:latin typeface="Arial"/>
+                        </a:rPr>
+                        <a:t>Control+Shift+P</a:t>
+                      </a:r>
+                    </a:p>
+                  </a:txBody>
+                  <a:tcPr/>
+                </a:tc>
+                <a:tc>
+                  <a:txBody>
+                    <a:bodyPr wrap="square"/>
+                    <a:lstStyle/>
+                    <a:p>
+                      <a:r>
+                        <a:rPr sz="1800" b="0" lang="en-US">
+                          <a:latin typeface="Arial"/>
+                        </a:rPr>
+                        <a:t>Command+Shift+P</a:t>
+                      </a:r>
+                    </a:p>
+                  </a:txBody>
+                  <a:tcPr/>
+                </a:tc>
+              </a:tr>
+              <a:tr h="457200">
+                <a:tc>
+                  <a:txBody>
+                    <a:bodyPr wrap="square"/>
+                    <a:lstStyle/>
+                    <a:p>
+                      <a:r>
+                        <a:rPr sz="1800" b="0" lang="en-US">
+                          <a:latin typeface="Arial"/>
+                        </a:rPr>
+                        <a:t>Move between parts of the window</a:t>
+                      </a:r>
+                    </a:p>
+                  </a:txBody>
+                  <a:tcPr/>
+                </a:tc>
+                <a:tc>
+                  <a:txBody>
+                    <a:bodyPr wrap="square"/>
+                    <a:lstStyle/>
+                    <a:p>
+                      <a:r>
+                        <a:rPr sz="1800" b="0" lang="en-US">
+                          <a:latin typeface="Arial"/>
+                        </a:rPr>
+                        <a:t>F6</a:t>
+                      </a:r>
+                    </a:p>
+                  </a:txBody>
+                  <a:tcPr/>
+                </a:tc>
+                <a:tc>
+                  <a:txBody>
+                    <a:bodyPr wrap="square"/>
+                    <a:lstStyle/>
+                    <a:p>
+                      <a:r>
+                        <a:rPr sz="1800" b="0" lang="en-US">
+                          <a:latin typeface="Arial"/>
+                        </a:rPr>
+                        <a:t>F6</a:t>
+                      </a:r>
+                    </a:p>
+                  </a:txBody>
+                  <a:tcPr/>
+                </a:tc>
+              </a:tr>
+            </a:tbl>
+          </a:graphicData>
+        </a:graphic>
+      </p:graphicFrame>
     </p:spTree>
   </p:cSld>
   <p:clrMapOvr>
@@ -5000,6 +5083,633 @@
 </p:sld>
 </file>
 
+<file path=ppt/slides/slide20.xml><?xml version="1.0" encoding="utf-8"?>
+<p:sld xmlns:a="http://schemas.openxmlformats.org/drawingml/2006/main" xmlns:p="http://schemas.openxmlformats.org/presentationml/2006/main" xmlns:r="http://schemas.openxmlformats.org/officeDocument/2006/relationships">
+  <p:cSld>
+    <p:spTree>
+      <p:nvGrpSpPr>
+        <p:cNvPr id="1" name=""/>
+        <p:cNvGrpSpPr/>
+        <p:nvPr/>
+      </p:nvGrpSpPr>
+      <p:grpSpPr/>
+      <p:sp>
+        <p:nvSpPr>
+          <p:cNvPr id="2" name="Title 1"/>
+          <p:cNvSpPr>
+            <a:spLocks noGrp="1"/>
+          </p:cNvSpPr>
+          <p:nvPr>
+            <p:ph type="title"/>
+          </p:nvPr>
+        </p:nvSpPr>
+        <p:spPr>
+          <a:xfrm>
+            <a:off x="548640" y="365760"/>
+            <a:ext cx="11064240" cy="1097280"/>
+          </a:xfrm>
+        </p:spPr>
+        <p:txBody>
+          <a:bodyPr wrap="square"/>
+          <a:lstStyle/>
+          <a:p>
+            <a:r>
+              <a:rPr sz="3600" b="1" lang="en-US">
+                <a:latin typeface="Arial"/>
+              </a:rPr>
+              <a:t>Keys worth knowing (3 of 4)</a:t>
+            </a:r>
+          </a:p>
+        </p:txBody>
+      </p:sp>
+      <p:graphicFrame>
+        <p:nvGraphicFramePr>
+          <p:cNvPr id="3" name="Table 2" descr="Table: Keys worth knowing. Columns: To, Windows, Mac."/>
+          <p:cNvGraphicFramePr>
+            <a:graphicFrameLocks noGrp="1"/>
+          </p:cNvGraphicFramePr>
+          <p:nvPr/>
+        </p:nvGraphicFramePr>
+        <p:xfrm>
+          <a:off x="548640" y="1554480"/>
+          <a:ext cx="11064240" cy="914400"/>
+        </p:xfrm>
+        <a:graphic>
+          <a:graphicData uri="http://schemas.openxmlformats.org/drawingml/2006/table">
+            <a:tbl>
+              <a:tblPr firstRow="1" bandRow="1">
+                <a:tableStyleId>{5C22544A-7EE6-4342-B048-85BDC9FD1C3A}</a:tableStyleId>
+              </a:tblPr>
+              <a:tblGrid>
+                <a:gridCol w="3688080"/>
+                <a:gridCol w="3688080"/>
+                <a:gridCol w="3688080"/>
+              </a:tblGrid>
+              <a:tr h="457200">
+                <a:tc>
+                  <a:txBody>
+                    <a:bodyPr/>
+                    <a:lstStyle/>
+                    <a:p>
+                      <a:r>
+                        <a:rPr sz="1800" b="1" lang="en-US">
+                          <a:latin typeface="Arial"/>
+                        </a:rPr>
+                        <a:t>To</a:t>
+                      </a:r>
+                    </a:p>
+                  </a:txBody>
+                  <a:tcPr/>
+                </a:tc>
+                <a:tc>
+                  <a:txBody>
+                    <a:bodyPr/>
+                    <a:lstStyle/>
+                    <a:p>
+                      <a:r>
+                        <a:rPr sz="1800" b="1" lang="en-US">
+                          <a:latin typeface="Arial"/>
+                        </a:rPr>
+                        <a:t>Windows</a:t>
+                      </a:r>
+                    </a:p>
+                  </a:txBody>
+                  <a:tcPr/>
+                </a:tc>
+                <a:tc>
+                  <a:txBody>
+                    <a:bodyPr/>
+                    <a:lstStyle/>
+                    <a:p>
+                      <a:r>
+                        <a:rPr sz="1800" b="1" lang="en-US">
+                          <a:latin typeface="Arial"/>
+                        </a:rPr>
+                        <a:t>Mac</a:t>
+                      </a:r>
+                    </a:p>
+                  </a:txBody>
+                  <a:tcPr/>
+                </a:tc>
+              </a:tr>
+              <a:tr h="457200">
+                <a:tc>
+                  <a:txBody>
+                    <a:bodyPr wrap="square"/>
+                    <a:lstStyle/>
+                    <a:p>
+                      <a:r>
+                        <a:rPr sz="1800" b="0" lang="en-US">
+                          <a:latin typeface="Arial"/>
+                        </a:rPr>
+                        <a:t>Accessibility help for where you are</a:t>
+                      </a:r>
+                    </a:p>
+                  </a:txBody>
+                  <a:tcPr/>
+                </a:tc>
+                <a:tc>
+                  <a:txBody>
+                    <a:bodyPr wrap="square"/>
+                    <a:lstStyle/>
+                    <a:p>
+                      <a:r>
+                        <a:rPr sz="1800" b="0" lang="en-US">
+                          <a:latin typeface="Arial"/>
+                        </a:rPr>
+                        <a:t>Alt+F1</a:t>
+                      </a:r>
+                    </a:p>
+                  </a:txBody>
+                  <a:tcPr/>
+                </a:tc>
+                <a:tc>
+                  <a:txBody>
+                    <a:bodyPr wrap="square"/>
+                    <a:lstStyle/>
+                    <a:p>
+                      <a:r>
+                        <a:rPr sz="1800" b="0" lang="en-US">
+                          <a:latin typeface="Arial"/>
+                        </a:rPr>
+                        <a:t>Option+F1</a:t>
+                      </a:r>
+                    </a:p>
+                  </a:txBody>
+                  <a:tcPr/>
+                </a:tc>
+              </a:tr>
+            </a:tbl>
+          </a:graphicData>
+        </a:graphic>
+      </p:graphicFrame>
+    </p:spTree>
+  </p:cSld>
+  <p:clrMapOvr>
+    <a:masterClrMapping/>
+  </p:clrMapOvr>
+</p:sld>
+</file>
+
+<file path=ppt/slides/slide21.xml><?xml version="1.0" encoding="utf-8"?>
+<p:sld xmlns:a="http://schemas.openxmlformats.org/drawingml/2006/main" xmlns:p="http://schemas.openxmlformats.org/presentationml/2006/main" xmlns:r="http://schemas.openxmlformats.org/officeDocument/2006/relationships">
+  <p:cSld>
+    <p:spTree>
+      <p:nvGrpSpPr>
+        <p:cNvPr id="1" name=""/>
+        <p:cNvGrpSpPr/>
+        <p:nvPr/>
+      </p:nvGrpSpPr>
+      <p:grpSpPr/>
+      <p:sp>
+        <p:nvSpPr>
+          <p:cNvPr id="2" name="Title 1"/>
+          <p:cNvSpPr>
+            <a:spLocks noGrp="1"/>
+          </p:cNvSpPr>
+          <p:nvPr>
+            <p:ph type="title"/>
+          </p:nvPr>
+        </p:nvSpPr>
+        <p:spPr>
+          <a:xfrm>
+            <a:off x="548640" y="365760"/>
+            <a:ext cx="11064240" cy="1097280"/>
+          </a:xfrm>
+        </p:spPr>
+        <p:txBody>
+          <a:bodyPr wrap="square"/>
+          <a:lstStyle/>
+          <a:p>
+            <a:r>
+              <a:rPr sz="3600" b="1" lang="en-US">
+                <a:latin typeface="Arial"/>
+              </a:rPr>
+              <a:t>Keys worth knowing (4 of 4)</a:t>
+            </a:r>
+          </a:p>
+        </p:txBody>
+      </p:sp>
+      <p:sp>
+        <p:nvSpPr>
+          <p:cNvPr id="3" name="Content Placeholder 2"/>
+          <p:cNvSpPr>
+            <a:spLocks noGrp="1"/>
+          </p:cNvSpPr>
+          <p:nvPr>
+            <p:ph idx="1"/>
+          </p:nvPr>
+        </p:nvSpPr>
+        <p:spPr>
+          <a:xfrm>
+            <a:off x="548640" y="1554480"/>
+            <a:ext cx="11064240" cy="4937760"/>
+          </a:xfrm>
+        </p:spPr>
+        <p:txBody>
+          <a:bodyPr wrap="square"/>
+          <a:lstStyle/>
+          <a:p>
+            <a:pPr marL="0" indent="0">
+              <a:spcAft>
+                <a:spcPts val="600"/>
+              </a:spcAft>
+              <a:buNone/>
+            </a:pPr>
+            <a:r>
+              <a:rPr sz="2000" b="0" lang="en-US">
+                <a:latin typeface="Arial"/>
+              </a:rPr>
+              <a:t>With a screen reader running, VS Code plays a sound when Copilot's answer arrives and another when Copilot needs you to approve something. The settings are </a:t>
+            </a:r>
+            <a:r>
+              <a:rPr sz="2000" b="0" lang="en-US">
+                <a:latin typeface="Consolas"/>
+              </a:rPr>
+              <a:t>accessibility.signals.chatResponseReceived</a:t>
+            </a:r>
+            <a:r>
+              <a:rPr sz="2000" b="0" lang="en-US">
+                <a:latin typeface="Arial"/>
+              </a:rPr>
+              <a:t> and </a:t>
+            </a:r>
+            <a:r>
+              <a:rPr sz="2000" b="0" lang="en-US">
+                <a:latin typeface="Consolas"/>
+              </a:rPr>
+              <a:t>accessibility.signals.chatUserActionRequired</a:t>
+            </a:r>
+            <a:r>
+              <a:rPr sz="2000" b="0" lang="en-US">
+                <a:latin typeface="Arial"/>
+              </a:rPr>
+              <a:t>. While Copilot works, it says what it is doing; </a:t>
+            </a:r>
+            <a:r>
+              <a:rPr sz="2000" b="0" lang="en-US">
+                <a:latin typeface="Consolas"/>
+              </a:rPr>
+              <a:t>accessibility.verboseChatProgressUpdates</a:t>
+            </a:r>
+            <a:r>
+              <a:rPr sz="2000" b="0" lang="en-US">
+                <a:latin typeface="Arial"/>
+              </a:rPr>
+              <a:t> turns that off. The kit sets chat text to 18 point with </a:t>
+            </a:r>
+            <a:r>
+              <a:rPr sz="2000" b="0" lang="en-US">
+                <a:latin typeface="Consolas"/>
+              </a:rPr>
+              <a:t>chat.fontSize</a:t>
+            </a:r>
+            <a:r>
+              <a:rPr sz="2000" b="0" lang="en-US">
+                <a:latin typeface="Arial"/>
+              </a:rPr>
+              <a:t>.</a:t>
+            </a:r>
+          </a:p>
+        </p:txBody>
+      </p:sp>
+    </p:spTree>
+  </p:cSld>
+  <p:clrMapOvr>
+    <a:masterClrMapping/>
+  </p:clrMapOvr>
+</p:sld>
+</file>
+
+<file path=ppt/slides/slide22.xml><?xml version="1.0" encoding="utf-8"?>
+<p:sld xmlns:a="http://schemas.openxmlformats.org/drawingml/2006/main" xmlns:p="http://schemas.openxmlformats.org/presentationml/2006/main" xmlns:r="http://schemas.openxmlformats.org/officeDocument/2006/relationships">
+  <p:cSld>
+    <p:spTree>
+      <p:nvGrpSpPr>
+        <p:cNvPr id="1" name=""/>
+        <p:cNvGrpSpPr/>
+        <p:nvPr/>
+      </p:nvGrpSpPr>
+      <p:grpSpPr/>
+      <p:sp>
+        <p:nvSpPr>
+          <p:cNvPr id="2" name="Title 1"/>
+          <p:cNvSpPr>
+            <a:spLocks noGrp="1"/>
+          </p:cNvSpPr>
+          <p:nvPr>
+            <p:ph type="title"/>
+          </p:nvPr>
+        </p:nvSpPr>
+        <p:spPr>
+          <a:xfrm>
+            <a:off x="548640" y="365760"/>
+            <a:ext cx="11064240" cy="1097280"/>
+          </a:xfrm>
+        </p:spPr>
+        <p:txBody>
+          <a:bodyPr wrap="square"/>
+          <a:lstStyle/>
+          <a:p>
+            <a:r>
+              <a:rPr sz="3600" b="1" lang="en-US">
+                <a:latin typeface="Arial"/>
+              </a:rPr>
+              <a:t>The two rules</a:t>
+            </a:r>
+          </a:p>
+        </p:txBody>
+      </p:sp>
+      <p:sp>
+        <p:nvSpPr>
+          <p:cNvPr id="3" name="Content Placeholder 2"/>
+          <p:cNvSpPr>
+            <a:spLocks noGrp="1"/>
+          </p:cNvSpPr>
+          <p:nvPr>
+            <p:ph idx="1"/>
+          </p:nvPr>
+        </p:nvSpPr>
+        <p:spPr>
+          <a:xfrm>
+            <a:off x="548640" y="1554480"/>
+            <a:ext cx="11064240" cy="4937760"/>
+          </a:xfrm>
+        </p:spPr>
+        <p:txBody>
+          <a:bodyPr wrap="square"/>
+          <a:lstStyle/>
+          <a:p>
+            <a:pPr lvl="1">
+              <a:spcAft>
+                <a:spcPts val="600"/>
+              </a:spcAft>
+              <a:buNone/>
+            </a:pPr>
+            <a:r>
+              <a:rPr sz="2000" b="0" lang="en-US">
+                <a:latin typeface="Arial"/>
+              </a:rPr>
+              <a:t>1. </a:t>
+            </a:r>
+            <a:r>
+              <a:rPr sz="2000" b="0" lang="en-US">
+                <a:latin typeface="Arial"/>
+              </a:rPr>
+              <a:t>Never paste anything private into any AI: student records, health or disability information, or anyone's name. Use the sample course.</a:t>
+            </a:r>
+          </a:p>
+          <a:p>
+            <a:pPr lvl="1">
+              <a:spcAft>
+                <a:spcPts val="600"/>
+              </a:spcAft>
+              <a:buNone/>
+            </a:pPr>
+            <a:r>
+              <a:rPr sz="2000" b="0" lang="en-US">
+                <a:latin typeface="Arial"/>
+              </a:rPr>
+              <a:t>2. </a:t>
+            </a:r>
+            <a:r>
+              <a:rPr sz="2000" b="0" lang="en-US">
+                <a:latin typeface="Arial"/>
+              </a:rPr>
+              <a:t>Every agent ends with a person checking its work.</a:t>
+            </a:r>
+          </a:p>
+          <a:p>
+            <a:pPr marL="0" indent="0">
+              <a:spcAft>
+                <a:spcPts val="600"/>
+              </a:spcAft>
+              <a:buNone/>
+            </a:pPr>
+            <a:r>
+              <a:rPr sz="2000" b="0" lang="en-US">
+                <a:latin typeface="Arial"/>
+              </a:rPr>
+              <a:t>Help, before or after the day: </a:t>
+            </a:r>
+            <a:r>
+              <a:rPr sz="2000" b="0" lang="en-US">
+                <a:latin typeface="Arial"/>
+                <a:hlinkClick r:id="rId2"/>
+              </a:rPr>
+              <a:t>support@community-access.org</a:t>
+            </a:r>
+            <a:r>
+              <a:rPr sz="2000" b="0" lang="en-US">
+                <a:latin typeface="Arial"/>
+              </a:rPr>
+              <a:t>.</a:t>
+            </a:r>
+          </a:p>
+        </p:txBody>
+      </p:sp>
+    </p:spTree>
+  </p:cSld>
+  <p:clrMapOvr>
+    <a:masterClrMapping/>
+  </p:clrMapOvr>
+</p:sld>
+</file>
+
+<file path=ppt/slides/slide23.xml><?xml version="1.0" encoding="utf-8"?>
+<p:sld xmlns:a="http://schemas.openxmlformats.org/drawingml/2006/main" xmlns:p="http://schemas.openxmlformats.org/presentationml/2006/main" xmlns:r="http://schemas.openxmlformats.org/officeDocument/2006/relationships">
+  <p:cSld>
+    <p:spTree>
+      <p:nvGrpSpPr>
+        <p:cNvPr id="1" name=""/>
+        <p:cNvGrpSpPr/>
+        <p:nvPr/>
+      </p:nvGrpSpPr>
+      <p:grpSpPr/>
+      <p:sp>
+        <p:nvSpPr>
+          <p:cNvPr id="2" name="Title 1"/>
+          <p:cNvSpPr>
+            <a:spLocks noGrp="1"/>
+          </p:cNvSpPr>
+          <p:nvPr>
+            <p:ph type="title"/>
+          </p:nvPr>
+        </p:nvSpPr>
+        <p:spPr>
+          <a:xfrm>
+            <a:off x="548640" y="365760"/>
+            <a:ext cx="11064240" cy="1097280"/>
+          </a:xfrm>
+        </p:spPr>
+        <p:txBody>
+          <a:bodyPr wrap="square"/>
+          <a:lstStyle/>
+          <a:p>
+            <a:r>
+              <a:rPr sz="3600" b="1" lang="en-US">
+                <a:latin typeface="Arial"/>
+              </a:rPr>
+              <a:t>Sources</a:t>
+            </a:r>
+          </a:p>
+        </p:txBody>
+      </p:sp>
+      <p:sp>
+        <p:nvSpPr>
+          <p:cNvPr id="3" name="Content Placeholder 2"/>
+          <p:cNvSpPr>
+            <a:spLocks noGrp="1"/>
+          </p:cNvSpPr>
+          <p:nvPr>
+            <p:ph idx="1"/>
+          </p:nvPr>
+        </p:nvSpPr>
+        <p:spPr>
+          <a:xfrm>
+            <a:off x="548640" y="1554480"/>
+            <a:ext cx="11064240" cy="4937760"/>
+          </a:xfrm>
+        </p:spPr>
+        <p:txBody>
+          <a:bodyPr wrap="square"/>
+          <a:lstStyle/>
+          <a:p>
+            <a:pPr marL="0" indent="0">
+              <a:spcAft>
+                <a:spcPts val="600"/>
+              </a:spcAft>
+              <a:buNone/>
+            </a:pPr>
+            <a:r>
+              <a:rPr sz="2000" b="0" lang="en-US">
+                <a:latin typeface="Arial"/>
+              </a:rPr>
+              <a:t>Checked on 29 October 2026.</a:t>
+            </a:r>
+          </a:p>
+          <a:p>
+            <a:pPr lvl="1">
+              <a:spcAft>
+                <a:spcPts val="600"/>
+              </a:spcAft>
+            </a:pPr>
+            <a:r>
+              <a:rPr sz="2000" b="0" lang="en-US">
+                <a:latin typeface="Arial"/>
+                <a:hlinkClick r:id="rId2"/>
+              </a:rPr>
+              <a:t>VS Code: accessibility</a:t>
+            </a:r>
+            <a:r>
+              <a:rPr sz="2000" b="0" lang="en-US">
+                <a:latin typeface="Arial"/>
+              </a:rPr>
+              <a:t>: the Accessible View (Alt+F2), accessibility help (Alt+F1) and moving between parts of the window (F6).</a:t>
+            </a:r>
+          </a:p>
+          <a:p>
+            <a:pPr lvl="1">
+              <a:spcAft>
+                <a:spcPts val="600"/>
+              </a:spcAft>
+            </a:pPr>
+            <a:r>
+              <a:rPr sz="2000" b="0" lang="en-US">
+                <a:latin typeface="Arial"/>
+                <a:hlinkClick r:id="rId3"/>
+              </a:rPr>
+              <a:t>VS Code: Copilot features cheat sheet</a:t>
+            </a:r>
+            <a:r>
+              <a:rPr sz="2000" b="0" lang="en-US">
+                <a:latin typeface="Arial"/>
+              </a:rPr>
+              <a:t>: opening Copilot Chat.</a:t>
+            </a:r>
+          </a:p>
+          <a:p>
+            <a:pPr lvl="1">
+              <a:spcAft>
+                <a:spcPts val="600"/>
+              </a:spcAft>
+            </a:pPr>
+            <a:r>
+              <a:rPr sz="2000" b="0" lang="en-US">
+                <a:latin typeface="Arial"/>
+                <a:hlinkClick r:id="rId4"/>
+              </a:rPr>
+              <a:t>VS Code: Copilot settings reference</a:t>
+            </a:r>
+            <a:r>
+              <a:rPr sz="2000" b="0" lang="en-US">
+                <a:latin typeface="Arial"/>
+              </a:rPr>
+              <a:t>: the chat sound, progress and text size settings.</a:t>
+            </a:r>
+          </a:p>
+          <a:p>
+            <a:pPr lvl="1">
+              <a:spcAft>
+                <a:spcPts val="600"/>
+              </a:spcAft>
+            </a:pPr>
+            <a:r>
+              <a:rPr sz="2000" b="0" lang="en-US">
+                <a:latin typeface="Arial"/>
+                <a:hlinkClick r:id="rId5"/>
+              </a:rPr>
+              <a:t>VS Code for the Web</a:t>
+            </a:r>
+            <a:r>
+              <a:rPr sz="2000" b="0" lang="en-US">
+                <a:latin typeface="Arial"/>
+              </a:rPr>
+              <a:t>: opening a folder from your computer works in Chrome and Edge.</a:t>
+            </a:r>
+          </a:p>
+          <a:p>
+            <a:pPr lvl="1">
+              <a:spcAft>
+                <a:spcPts val="600"/>
+              </a:spcAft>
+            </a:pPr>
+            <a:r>
+              <a:rPr sz="2000" b="0" lang="en-US">
+                <a:latin typeface="Arial"/>
+                <a:hlinkClick r:id="rId6"/>
+              </a:rPr>
+              <a:t>VS Code: use Agent Skills</a:t>
+            </a:r>
+            <a:r>
+              <a:rPr sz="2000" b="0" lang="en-US">
+                <a:latin typeface="Arial"/>
+              </a:rPr>
+              <a:t>: how the commands in </a:t>
+            </a:r>
+            <a:r>
+              <a:rPr sz="2000" b="0" lang="en-US">
+                <a:latin typeface="Consolas"/>
+              </a:rPr>
+              <a:t>.github/skills</a:t>
+            </a:r>
+            <a:r>
+              <a:rPr sz="2000" b="0" lang="en-US">
+                <a:latin typeface="Arial"/>
+              </a:rPr>
+              <a:t> work.</a:t>
+            </a:r>
+          </a:p>
+        </p:txBody>
+      </p:sp>
+    </p:spTree>
+  </p:cSld>
+  <p:clrMapOvr>
+    <a:masterClrMapping/>
+  </p:clrMapOvr>
+</p:sld>
+</file>
+
 <file path=ppt/slides/slide3.xml><?xml version="1.0" encoding="utf-8"?>
 <p:sld xmlns:a="http://schemas.openxmlformats.org/drawingml/2006/main" xmlns:p="http://schemas.openxmlformats.org/presentationml/2006/main" xmlns:r="http://schemas.openxmlformats.org/officeDocument/2006/relationships">
   <p:cSld>
@@ -5228,7 +5938,7 @@
               <a:rPr sz="2000" b="0" lang="en-US">
                 <a:latin typeface="Arial"/>
               </a:rPr>
-              <a:t>Type /ready-check and press Enter. Copilot checks five things and tells you that you are ready.</a:t>
+              <a:t>Type /ready-check and press Enter. Copilot checks six things and tells you that you are ready.</a:t>
             </a:r>
           </a:p>
           <a:p>

--- a/docs/ahg-2026/kit/read-me.pptx
+++ b/docs/ahg-2026/kit/read-me.pptx
@@ -4109,7 +4109,7 @@
         </p:nvGraphicFramePr>
         <p:xfrm>
           <a:off x="548640" y="1554480"/>
-          <a:ext cx="11064240" cy="1371600"/>
+          <a:ext cx="11064240" cy="1828800"/>
         </p:xfrm>
         <a:graphic>
           <a:graphicData uri="http://schemas.openxmlformats.org/drawingml/2006/table">
@@ -4211,6 +4211,38 @@
                           <a:latin typeface="Arial"/>
                         </a:rPr>
                         <a:t>The words used today, one line each</a:t>
+                      </a:r>
+                    </a:p>
+                  </a:txBody>
+                  <a:tcPr/>
+                </a:tc>
+              </a:tr>
+              <a:tr h="457200">
+                <a:tc>
+                  <a:txBody>
+                    <a:bodyPr wrap="square"/>
+                    <a:lstStyle/>
+                    <a:p>
+                      <a:r>
+                        <a:rPr sz="1800" b="0" lang="en-US">
+                          <a:latin typeface="Consolas"/>
+                        </a:rPr>
+                        <a:t>write-your-own-agent.md</a:t>
+                      </a:r>
+                    </a:p>
+                  </a:txBody>
+                  <a:tcPr/>
+                </a:tc>
+                <a:tc>
+                  <a:txBody>
+                    <a:bodyPr wrap="square"/>
+                    <a:lstStyle/>
+                    <a:p>
+                      <a:r>
+                        <a:rPr sz="1800" b="0" lang="en-US">
+                          <a:latin typeface="Arial"/>
+                        </a:rPr>
+                        <a:t>The full tutorial: write, test, ground, revise and share an agent on your own, in any assistant</a:t>
                       </a:r>
                     </a:p>
                   </a:txBody>
